--- a/assets/pptx/catalog-447.pptx
+++ b/assets/pptx/catalog-447.pptx
@@ -3371,7 +3371,7 @@
                 <a:ea typeface="Ebrima"/>
                 <a:cs typeface="Ebrima"/>
               </a:rPr>
-              <a:t>አንተ እኮ ነህ (4x)</a:t>
+              <a:t>አንተ እኮ ነህ 4x</a:t>
             </a:r>
           </a:p>
           <a:p>
@@ -3492,7 +3492,7 @@
                 <a:ea typeface="Ebrima"/>
                 <a:cs typeface="Ebrima"/>
               </a:rPr>
-              <a:t>አሳድጎም ለማዕረግ ለወግም ያበቃል (2x)</a:t>
+              <a:t>አሳድጎም ለማዕረግ ለወግም ያበቃል 2x</a:t>
             </a:r>
           </a:p>
         </p:txBody>
@@ -3837,7 +3837,7 @@
                 <a:ea typeface="Ebrima"/>
                 <a:cs typeface="Ebrima"/>
               </a:rPr>
-              <a:t>አንተ እኮ ነህ ሰብሳቢዬ ኢየሱስዬ አሳዳጊዬ ኢየሱስዬ (4x)</a:t>
+              <a:t>አንተ እኮ ነህ ሰብሳቢዬ ኢየሱስዬ አሳዳጊዬ ኢየሱስዬ 4x</a:t>
             </a:r>
           </a:p>
           <a:p>
@@ -4043,7 +4043,7 @@
                 <a:ea typeface="Ebrima"/>
                 <a:cs typeface="Ebrima"/>
               </a:rPr>
-              <a:t>አንተ እኮ ነህ መታሰቢያዬ የሱስዬ መታወቂያዬ ኢየሱስዬ (4x)</a:t>
+              <a:t>አንተ እኮ ነህ መታሰቢያዬ የሱስዬ መታወቂያዬ ኢየሱስዬ 4x</a:t>
             </a:r>
           </a:p>
           <a:p>
@@ -4249,7 +4249,7 @@
                 <a:ea typeface="Ebrima"/>
                 <a:cs typeface="Ebrima"/>
               </a:rPr>
-              <a:t>አንተ እኮ ነህ ጊዜ ታዳጊዬ ኢየሱስዬ ጠባቂዬ ኢየሱስዬ (4x)</a:t>
+              <a:t>አንተ እኮ ነህ ጊዜ ታዳጊዬ ኢየሱስዬ ጠባቂዬ ኢየሱስዬ 4x</a:t>
             </a:r>
           </a:p>
           <a:p>
